--- a/발표자료_CNC설비_정상불량판별.pptx
+++ b/발표자료_CNC설비_정상불량판별.pptx
@@ -137,23 +137,31 @@
 </p:presentation>
 </file>
 
+<file path=ppt/revisionInfo.xml><?xml version="1.0" encoding="utf-8"?>
+<p1510:revInfo xmlns:a="http://schemas.openxmlformats.org/drawingml/2006/main" xmlns:r="http://schemas.openxmlformats.org/officeDocument/2006/relationships" xmlns:p1510="http://schemas.microsoft.com/office/powerpoint/2015/10/main">
+  <p1510:revLst>
+    <p1510:client id="{2C1DE5F2-DB31-4FD2-A133-9867C399CE2E}" v="2" dt="2026-08-27T07:44:36.345"/>
+  </p1510:revLst>
+</p1510:revInfo>
+</file>
+
 <file path=ppt/changesInfos/changesInfo1.xml><?xml version="1.0" encoding="utf-8"?>
 <pc:chgInfo xmlns:a="http://schemas.openxmlformats.org/drawingml/2006/main" xmlns:r="http://schemas.openxmlformats.org/officeDocument/2006/relationships" xmlns:ac="http://schemas.microsoft.com/office/drawing/2013/main/command" xmlns:pc="http://schemas.microsoft.com/office/powerpoint/2013/main/command">
   <pc:docChgLst>
     <pc:chgData name="민엽 허" userId="688c9c03a5294cea" providerId="LiveId" clId="{DEB337A0-EA5B-44C9-A252-7D0AA4390C6E}"/>
-    <pc:docChg chg="modSld">
-      <pc:chgData name="민엽 허" userId="688c9c03a5294cea" providerId="LiveId" clId="{DEB337A0-EA5B-44C9-A252-7D0AA4390C6E}" dt="2026-08-27T07:13:48.459" v="19" actId="14100"/>
+    <pc:docChg chg="undo custSel modSld">
+      <pc:chgData name="민엽 허" userId="688c9c03a5294cea" providerId="LiveId" clId="{DEB337A0-EA5B-44C9-A252-7D0AA4390C6E}" dt="2026-08-27T07:45:50.158" v="33" actId="1076"/>
       <pc:docMkLst>
         <pc:docMk/>
       </pc:docMkLst>
       <pc:sldChg chg="modSp mod">
-        <pc:chgData name="민엽 허" userId="688c9c03a5294cea" providerId="LiveId" clId="{DEB337A0-EA5B-44C9-A252-7D0AA4390C6E}" dt="2026-08-27T07:10:53.581" v="18" actId="20577"/>
+        <pc:chgData name="민엽 허" userId="688c9c03a5294cea" providerId="LiveId" clId="{DEB337A0-EA5B-44C9-A252-7D0AA4390C6E}" dt="2026-08-27T07:45:50.158" v="33" actId="1076"/>
         <pc:sldMkLst>
           <pc:docMk/>
           <pc:sldMk cId="0" sldId="258"/>
         </pc:sldMkLst>
         <pc:spChg chg="mod">
-          <ac:chgData name="민엽 허" userId="688c9c03a5294cea" providerId="LiveId" clId="{DEB337A0-EA5B-44C9-A252-7D0AA4390C6E}" dt="2026-08-27T07:10:53.581" v="18" actId="20577"/>
+          <ac:chgData name="민엽 허" userId="688c9c03a5294cea" providerId="LiveId" clId="{DEB337A0-EA5B-44C9-A252-7D0AA4390C6E}" dt="2026-08-27T07:45:50.158" v="33" actId="1076"/>
           <ac:spMkLst>
             <pc:docMk/>
             <pc:sldMk cId="0" sldId="258"/>
@@ -162,19 +170,80 @@
         </pc:spChg>
       </pc:sldChg>
       <pc:sldChg chg="modSp mod">
-        <pc:chgData name="민엽 허" userId="688c9c03a5294cea" providerId="LiveId" clId="{DEB337A0-EA5B-44C9-A252-7D0AA4390C6E}" dt="2026-08-27T07:13:48.459" v="19" actId="14100"/>
+        <pc:chgData name="민엽 허" userId="688c9c03a5294cea" providerId="LiveId" clId="{DEB337A0-EA5B-44C9-A252-7D0AA4390C6E}" dt="2026-08-27T07:39:51.483" v="22" actId="113"/>
+        <pc:sldMkLst>
+          <pc:docMk/>
+          <pc:sldMk cId="0" sldId="263"/>
+        </pc:sldMkLst>
+        <pc:graphicFrameChg chg="modGraphic">
+          <ac:chgData name="민엽 허" userId="688c9c03a5294cea" providerId="LiveId" clId="{DEB337A0-EA5B-44C9-A252-7D0AA4390C6E}" dt="2026-08-27T07:39:51.483" v="22" actId="113"/>
+          <ac:graphicFrameMkLst>
+            <pc:docMk/>
+            <pc:sldMk cId="0" sldId="263"/>
+            <ac:graphicFrameMk id="7" creationId="{00000000-0000-0000-0000-000000000000}"/>
+          </ac:graphicFrameMkLst>
+        </pc:graphicFrameChg>
+      </pc:sldChg>
+      <pc:sldChg chg="modSp mod">
+        <pc:chgData name="민엽 허" userId="688c9c03a5294cea" providerId="LiveId" clId="{DEB337A0-EA5B-44C9-A252-7D0AA4390C6E}" dt="2026-08-27T07:42:29.631" v="25" actId="1076"/>
         <pc:sldMkLst>
           <pc:docMk/>
           <pc:sldMk cId="0" sldId="264"/>
         </pc:sldMkLst>
         <pc:spChg chg="mod">
-          <ac:chgData name="민엽 허" userId="688c9c03a5294cea" providerId="LiveId" clId="{DEB337A0-EA5B-44C9-A252-7D0AA4390C6E}" dt="2026-08-27T07:13:48.459" v="19" actId="14100"/>
+          <ac:chgData name="민엽 허" userId="688c9c03a5294cea" providerId="LiveId" clId="{DEB337A0-EA5B-44C9-A252-7D0AA4390C6E}" dt="2026-08-27T07:42:29.631" v="25" actId="1076"/>
           <ac:spMkLst>
             <pc:docMk/>
             <pc:sldMk cId="0" sldId="264"/>
             <ac:spMk id="6" creationId="{00000000-0000-0000-0000-000000000000}"/>
           </ac:spMkLst>
         </pc:spChg>
+        <pc:graphicFrameChg chg="mod">
+          <ac:chgData name="민엽 허" userId="688c9c03a5294cea" providerId="LiveId" clId="{DEB337A0-EA5B-44C9-A252-7D0AA4390C6E}" dt="2026-08-27T07:41:49.762" v="23" actId="1076"/>
+          <ac:graphicFrameMkLst>
+            <pc:docMk/>
+            <pc:sldMk cId="0" sldId="264"/>
+            <ac:graphicFrameMk id="7" creationId="{00000000-0000-0000-0000-000000000000}"/>
+          </ac:graphicFrameMkLst>
+        </pc:graphicFrameChg>
+      </pc:sldChg>
+      <pc:sldChg chg="modSp mod">
+        <pc:chgData name="민엽 허" userId="688c9c03a5294cea" providerId="LiveId" clId="{DEB337A0-EA5B-44C9-A252-7D0AA4390C6E}" dt="2026-08-27T07:44:29.259" v="28" actId="113"/>
+        <pc:sldMkLst>
+          <pc:docMk/>
+          <pc:sldMk cId="0" sldId="266"/>
+        </pc:sldMkLst>
+        <pc:graphicFrameChg chg="modGraphic">
+          <ac:chgData name="민엽 허" userId="688c9c03a5294cea" providerId="LiveId" clId="{DEB337A0-EA5B-44C9-A252-7D0AA4390C6E}" dt="2026-08-27T07:44:29.259" v="28" actId="113"/>
+          <ac:graphicFrameMkLst>
+            <pc:docMk/>
+            <pc:sldMk cId="0" sldId="266"/>
+            <ac:graphicFrameMk id="7" creationId="{00000000-0000-0000-0000-000000000000}"/>
+          </ac:graphicFrameMkLst>
+        </pc:graphicFrameChg>
+      </pc:sldChg>
+      <pc:sldChg chg="modSp mod">
+        <pc:chgData name="민엽 허" userId="688c9c03a5294cea" providerId="LiveId" clId="{DEB337A0-EA5B-44C9-A252-7D0AA4390C6E}" dt="2026-08-27T07:45:09.587" v="31" actId="113"/>
+        <pc:sldMkLst>
+          <pc:docMk/>
+          <pc:sldMk cId="0" sldId="267"/>
+        </pc:sldMkLst>
+        <pc:spChg chg="mod">
+          <ac:chgData name="민엽 허" userId="688c9c03a5294cea" providerId="LiveId" clId="{DEB337A0-EA5B-44C9-A252-7D0AA4390C6E}" dt="2026-08-27T07:44:36.345" v="30" actId="20578"/>
+          <ac:spMkLst>
+            <pc:docMk/>
+            <pc:sldMk cId="0" sldId="267"/>
+            <ac:spMk id="7" creationId="{00000000-0000-0000-0000-000000000000}"/>
+          </ac:spMkLst>
+        </pc:spChg>
+        <pc:graphicFrameChg chg="modGraphic">
+          <ac:chgData name="민엽 허" userId="688c9c03a5294cea" providerId="LiveId" clId="{DEB337A0-EA5B-44C9-A252-7D0AA4390C6E}" dt="2026-08-27T07:45:09.587" v="31" actId="113"/>
+          <ac:graphicFrameMkLst>
+            <pc:docMk/>
+            <pc:sldMk cId="0" sldId="267"/>
+            <ac:graphicFrameMk id="8" creationId="{00000000-0000-0000-0000-000000000000}"/>
+          </ac:graphicFrameMkLst>
+        </pc:graphicFrameChg>
       </pc:sldChg>
     </pc:docChg>
   </pc:docChgLst>
@@ -4782,7 +4851,13 @@
           <p:cNvGraphicFramePr>
             <a:graphicFrameLocks noGrp="1"/>
           </p:cNvGraphicFramePr>
-          <p:nvPr/>
+          <p:nvPr>
+            <p:extLst>
+              <p:ext uri="{D42A27DB-BD31-4B8C-83A1-F6EECF244321}">
+                <p14:modId xmlns:p14="http://schemas.microsoft.com/office/powerpoint/2010/main" val="225177459"/>
+              </p:ext>
+            </p:extLst>
+          </p:nvPr>
         </p:nvGraphicFramePr>
         <p:xfrm>
           <a:off x="7406640" y="1783080"/>
@@ -5152,7 +5227,7 @@
                     <a:p>
                       <a:pPr algn="ctr"/>
                       <a:r>
-                        <a:rPr sz="1050" b="0">
+                        <a:rPr sz="1050" b="1" dirty="0">
                           <a:solidFill>
                             <a:srgbClr val="1F2A37"/>
                           </a:solidFill>
@@ -5175,7 +5250,7 @@
                     <a:p>
                       <a:pPr algn="ctr"/>
                       <a:r>
-                        <a:rPr sz="1050" b="0">
+                        <a:rPr sz="1050" b="0" dirty="0">
                           <a:solidFill>
                             <a:srgbClr val="1F2A37"/>
                           </a:solidFill>
@@ -5327,7 +5402,7 @@
                     <a:p>
                       <a:pPr algn="ctr"/>
                       <a:r>
-                        <a:rPr sz="1050" b="0">
+                        <a:rPr sz="1050" b="0" dirty="0">
                           <a:solidFill>
                             <a:srgbClr val="1F2A37"/>
                           </a:solidFill>
@@ -5745,13 +5820,49 @@
               </a:spcAft>
             </a:pPr>
             <a:r>
-              <a:rPr sz="1200" b="0">
-                <a:solidFill>
-                  <a:srgbClr val="1F2A37"/>
-                </a:solidFill>
-                <a:latin typeface="맑은 고딕"/>
-              </a:rPr>
-              <a:t>•  Baseline 최고는 LightGBM (F1 0.800)</a:t>
+              <a:rPr sz="1200" b="0" dirty="0">
+                <a:solidFill>
+                  <a:srgbClr val="1F2A37"/>
+                </a:solidFill>
+                <a:latin typeface="맑은 고딕"/>
+              </a:rPr>
+              <a:t>•  Baseline </a:t>
+            </a:r>
+            <a:r>
+              <a:rPr sz="1200" b="0" dirty="0" err="1">
+                <a:solidFill>
+                  <a:srgbClr val="1F2A37"/>
+                </a:solidFill>
+                <a:latin typeface="맑은 고딕"/>
+              </a:rPr>
+              <a:t>최고는</a:t>
+            </a:r>
+            <a:r>
+              <a:rPr sz="1200" b="0" dirty="0">
+                <a:solidFill>
+                  <a:srgbClr val="1F2A37"/>
+                </a:solidFill>
+                <a:latin typeface="맑은 고딕"/>
+              </a:rPr>
+              <a:t> </a:t>
+            </a:r>
+            <a:r>
+              <a:rPr sz="1200" b="0" dirty="0" err="1">
+                <a:solidFill>
+                  <a:srgbClr val="1F2A37"/>
+                </a:solidFill>
+                <a:latin typeface="맑은 고딕"/>
+              </a:rPr>
+              <a:t>LightGBM</a:t>
+            </a:r>
+            <a:r>
+              <a:rPr sz="1200" b="0" dirty="0">
+                <a:solidFill>
+                  <a:srgbClr val="1F2A37"/>
+                </a:solidFill>
+                <a:latin typeface="맑은 고딕"/>
+              </a:rPr>
+              <a:t> (F1 0.800)</a:t>
             </a:r>
           </a:p>
           <a:p>
@@ -5761,14 +5872,65 @@
               </a:spcAft>
             </a:pPr>
             <a:r>
-              <a:rPr sz="1200" b="0">
-                <a:solidFill>
-                  <a:srgbClr val="1F2A37"/>
-                </a:solidFill>
-                <a:latin typeface="맑은 고딕"/>
-              </a:rPr>
-              <a:t>•  Enhanced에서 Random Forest가 역전</a:t>
-            </a:r>
+              <a:rPr sz="1200" b="0" dirty="0">
+                <a:solidFill>
+                  <a:srgbClr val="1F2A37"/>
+                </a:solidFill>
+                <a:latin typeface="맑은 고딕"/>
+              </a:rPr>
+              <a:t>•  </a:t>
+            </a:r>
+            <a:r>
+              <a:rPr sz="1200" b="0" dirty="0" err="1">
+                <a:solidFill>
+                  <a:srgbClr val="1F2A37"/>
+                </a:solidFill>
+                <a:latin typeface="맑은 고딕"/>
+              </a:rPr>
+              <a:t>Enhanced에서</a:t>
+            </a:r>
+            <a:r>
+              <a:rPr sz="1200" b="0" dirty="0">
+                <a:solidFill>
+                  <a:srgbClr val="1F2A37"/>
+                </a:solidFill>
+                <a:latin typeface="맑은 고딕"/>
+              </a:rPr>
+              <a:t> Random </a:t>
+            </a:r>
+            <a:r>
+              <a:rPr sz="1200" b="0" dirty="0" err="1">
+                <a:solidFill>
+                  <a:srgbClr val="1F2A37"/>
+                </a:solidFill>
+                <a:latin typeface="맑은 고딕"/>
+              </a:rPr>
+              <a:t>Forest가</a:t>
+            </a:r>
+            <a:r>
+              <a:rPr sz="1200" b="0" dirty="0">
+                <a:solidFill>
+                  <a:srgbClr val="1F2A37"/>
+                </a:solidFill>
+                <a:latin typeface="맑은 고딕"/>
+              </a:rPr>
+              <a:t> </a:t>
+            </a:r>
+            <a:r>
+              <a:rPr sz="1200" b="0" dirty="0" err="1">
+                <a:solidFill>
+                  <a:srgbClr val="1F2A37"/>
+                </a:solidFill>
+                <a:latin typeface="맑은 고딕"/>
+              </a:rPr>
+              <a:t>역전</a:t>
+            </a:r>
+            <a:endParaRPr sz="1200" b="0" dirty="0">
+              <a:solidFill>
+                <a:srgbClr val="1F2A37"/>
+              </a:solidFill>
+              <a:latin typeface="맑은 고딕"/>
+            </a:endParaRPr>
           </a:p>
           <a:p>
             <a:pPr lvl="1">
@@ -5777,13 +5939,49 @@
               </a:spcAft>
             </a:pPr>
             <a:r>
-              <a:rPr sz="1100" b="0">
+              <a:rPr sz="1100" b="0" dirty="0">
                 <a:solidFill>
                   <a:srgbClr val="5B6672"/>
                 </a:solidFill>
                 <a:latin typeface="맑은 고딕"/>
               </a:rPr>
-              <a:t>–  F1 0.912 · 정밀도 1.000 · 재현율 0.838 · AUC 0.973</a:t>
+              <a:t>–  F1 0.912 · </a:t>
+            </a:r>
+            <a:r>
+              <a:rPr sz="1100" b="0" dirty="0" err="1">
+                <a:solidFill>
+                  <a:srgbClr val="5B6672"/>
+                </a:solidFill>
+                <a:latin typeface="맑은 고딕"/>
+              </a:rPr>
+              <a:t>정밀도</a:t>
+            </a:r>
+            <a:r>
+              <a:rPr sz="1100" b="0" dirty="0">
+                <a:solidFill>
+                  <a:srgbClr val="5B6672"/>
+                </a:solidFill>
+                <a:latin typeface="맑은 고딕"/>
+              </a:rPr>
+              <a:t> 1.000 · </a:t>
+            </a:r>
+            <a:r>
+              <a:rPr sz="1100" b="0" dirty="0" err="1">
+                <a:solidFill>
+                  <a:srgbClr val="5B6672"/>
+                </a:solidFill>
+                <a:latin typeface="맑은 고딕"/>
+              </a:rPr>
+              <a:t>재현율</a:t>
+            </a:r>
+            <a:r>
+              <a:rPr sz="1100" b="0" dirty="0">
+                <a:solidFill>
+                  <a:srgbClr val="5B6672"/>
+                </a:solidFill>
+                <a:latin typeface="맑은 고딕"/>
+              </a:rPr>
+              <a:t> 0.838 · AUC 0.973</a:t>
             </a:r>
           </a:p>
           <a:p>
@@ -5793,14 +5991,47 @@
               </a:spcAft>
             </a:pPr>
             <a:r>
-              <a:rPr sz="1200" b="0">
-                <a:solidFill>
-                  <a:srgbClr val="1F2A37"/>
-                </a:solidFill>
-                <a:latin typeface="맑은 고딕"/>
-              </a:rPr>
-              <a:t>•  재현율 0.838은 Enhanced 3모델 동일</a:t>
-            </a:r>
+              <a:rPr sz="1200" b="0" dirty="0">
+                <a:solidFill>
+                  <a:srgbClr val="1F2A37"/>
+                </a:solidFill>
+                <a:latin typeface="맑은 고딕"/>
+              </a:rPr>
+              <a:t>•  </a:t>
+            </a:r>
+            <a:r>
+              <a:rPr sz="1200" b="0" dirty="0" err="1">
+                <a:solidFill>
+                  <a:srgbClr val="1F2A37"/>
+                </a:solidFill>
+                <a:latin typeface="맑은 고딕"/>
+              </a:rPr>
+              <a:t>재현율</a:t>
+            </a:r>
+            <a:r>
+              <a:rPr sz="1200" b="0" dirty="0">
+                <a:solidFill>
+                  <a:srgbClr val="1F2A37"/>
+                </a:solidFill>
+                <a:latin typeface="맑은 고딕"/>
+              </a:rPr>
+              <a:t> 0.838은 Enhanced 3모델 </a:t>
+            </a:r>
+            <a:r>
+              <a:rPr sz="1200" b="0" dirty="0" err="1">
+                <a:solidFill>
+                  <a:srgbClr val="1F2A37"/>
+                </a:solidFill>
+                <a:latin typeface="맑은 고딕"/>
+              </a:rPr>
+              <a:t>동일</a:t>
+            </a:r>
+            <a:endParaRPr sz="1200" b="0" dirty="0">
+              <a:solidFill>
+                <a:srgbClr val="1F2A37"/>
+              </a:solidFill>
+              <a:latin typeface="맑은 고딕"/>
+            </a:endParaRPr>
           </a:p>
           <a:p>
             <a:pPr lvl="1">
@@ -5809,14 +6040,65 @@
               </a:spcAft>
             </a:pPr>
             <a:r>
-              <a:rPr sz="1100" b="0">
+              <a:rPr sz="1100" b="0" dirty="0">
                 <a:solidFill>
                   <a:srgbClr val="5B6672"/>
                 </a:solidFill>
                 <a:latin typeface="맑은 고딕"/>
               </a:rPr>
-              <a:t>–  risk_zone_count≥2 → 불량률 100% 규칙이 강력</a:t>
-            </a:r>
+              <a:t>–  risk_zone_count≥2 → </a:t>
+            </a:r>
+            <a:r>
+              <a:rPr sz="1100" b="0" dirty="0" err="1">
+                <a:solidFill>
+                  <a:srgbClr val="5B6672"/>
+                </a:solidFill>
+                <a:latin typeface="맑은 고딕"/>
+              </a:rPr>
+              <a:t>불량률</a:t>
+            </a:r>
+            <a:r>
+              <a:rPr sz="1100" b="0" dirty="0">
+                <a:solidFill>
+                  <a:srgbClr val="5B6672"/>
+                </a:solidFill>
+                <a:latin typeface="맑은 고딕"/>
+              </a:rPr>
+              <a:t> 100% </a:t>
+            </a:r>
+            <a:r>
+              <a:rPr sz="1100" b="0" dirty="0" err="1">
+                <a:solidFill>
+                  <a:srgbClr val="5B6672"/>
+                </a:solidFill>
+                <a:latin typeface="맑은 고딕"/>
+              </a:rPr>
+              <a:t>규칙이</a:t>
+            </a:r>
+            <a:r>
+              <a:rPr sz="1100" b="0" dirty="0">
+                <a:solidFill>
+                  <a:srgbClr val="5B6672"/>
+                </a:solidFill>
+                <a:latin typeface="맑은 고딕"/>
+              </a:rPr>
+              <a:t> </a:t>
+            </a:r>
+            <a:r>
+              <a:rPr sz="1100" b="0" dirty="0" err="1">
+                <a:solidFill>
+                  <a:srgbClr val="5B6672"/>
+                </a:solidFill>
+                <a:latin typeface="맑은 고딕"/>
+              </a:rPr>
+              <a:t>강력</a:t>
+            </a:r>
+            <a:endParaRPr sz="1100" b="0" dirty="0">
+              <a:solidFill>
+                <a:srgbClr val="5B6672"/>
+              </a:solidFill>
+              <a:latin typeface="맑은 고딕"/>
+            </a:endParaRPr>
           </a:p>
           <a:p>
             <a:pPr>
@@ -5825,14 +6107,65 @@
               </a:spcAft>
             </a:pPr>
             <a:r>
-              <a:rPr sz="1200" b="0">
-                <a:solidFill>
-                  <a:srgbClr val="1F2A37"/>
-                </a:solidFill>
-                <a:latin typeface="맑은 고딕"/>
-              </a:rPr>
-              <a:t>•  AUC는 6조합 0.970~0.974로 거의 동일</a:t>
-            </a:r>
+              <a:rPr sz="1200" b="0" dirty="0">
+                <a:solidFill>
+                  <a:srgbClr val="1F2A37"/>
+                </a:solidFill>
+                <a:latin typeface="맑은 고딕"/>
+              </a:rPr>
+              <a:t>•  </a:t>
+            </a:r>
+            <a:r>
+              <a:rPr sz="1200" b="0" dirty="0" err="1">
+                <a:solidFill>
+                  <a:srgbClr val="1F2A37"/>
+                </a:solidFill>
+                <a:latin typeface="맑은 고딕"/>
+              </a:rPr>
+              <a:t>AUC는</a:t>
+            </a:r>
+            <a:r>
+              <a:rPr sz="1200" b="0" dirty="0">
+                <a:solidFill>
+                  <a:srgbClr val="1F2A37"/>
+                </a:solidFill>
+                <a:latin typeface="맑은 고딕"/>
+              </a:rPr>
+              <a:t> 6조합 0.970~0.974로 </a:t>
+            </a:r>
+            <a:r>
+              <a:rPr sz="1200" b="0" dirty="0" err="1">
+                <a:solidFill>
+                  <a:srgbClr val="1F2A37"/>
+                </a:solidFill>
+                <a:latin typeface="맑은 고딕"/>
+              </a:rPr>
+              <a:t>거의</a:t>
+            </a:r>
+            <a:r>
+              <a:rPr sz="1200" b="0" dirty="0">
+                <a:solidFill>
+                  <a:srgbClr val="1F2A37"/>
+                </a:solidFill>
+                <a:latin typeface="맑은 고딕"/>
+              </a:rPr>
+              <a:t> </a:t>
+            </a:r>
+            <a:r>
+              <a:rPr sz="1200" b="0" dirty="0" err="1">
+                <a:solidFill>
+                  <a:srgbClr val="1F2A37"/>
+                </a:solidFill>
+                <a:latin typeface="맑은 고딕"/>
+              </a:rPr>
+              <a:t>동일</a:t>
+            </a:r>
+            <a:endParaRPr sz="1200" b="0" dirty="0">
+              <a:solidFill>
+                <a:srgbClr val="1F2A37"/>
+              </a:solidFill>
+              <a:latin typeface="맑은 고딕"/>
+            </a:endParaRPr>
           </a:p>
         </p:txBody>
       </p:sp>
@@ -5842,7 +6175,13 @@
           <p:cNvGraphicFramePr>
             <a:graphicFrameLocks noGrp="1"/>
           </p:cNvGraphicFramePr>
-          <p:nvPr/>
+          <p:nvPr>
+            <p:extLst>
+              <p:ext uri="{D42A27DB-BD31-4B8C-83A1-F6EECF244321}">
+                <p14:modId xmlns:p14="http://schemas.microsoft.com/office/powerpoint/2010/main" val="861638879"/>
+              </p:ext>
+            </p:extLst>
+          </p:nvPr>
         </p:nvGraphicFramePr>
         <p:xfrm>
           <a:off x="685800" y="5212080"/>
@@ -6311,7 +6650,7 @@
                     <a:p>
                       <a:pPr algn="ctr"/>
                       <a:r>
-                        <a:rPr sz="1050" b="0">
+                        <a:rPr sz="1050" b="1">
                           <a:solidFill>
                             <a:srgbClr val="1F2A37"/>
                           </a:solidFill>
@@ -6334,7 +6673,7 @@
                     <a:p>
                       <a:pPr algn="ctr"/>
                       <a:r>
-                        <a:rPr sz="1050" b="0">
+                        <a:rPr sz="1050" b="1">
                           <a:solidFill>
                             <a:srgbClr val="1F2A37"/>
                           </a:solidFill>
@@ -6357,7 +6696,7 @@
                     <a:p>
                       <a:pPr algn="ctr"/>
                       <a:r>
-                        <a:rPr sz="1050" b="0">
+                        <a:rPr sz="1050" b="1" dirty="0">
                           <a:solidFill>
                             <a:srgbClr val="1F2A37"/>
                           </a:solidFill>
@@ -6411,14 +6750,38 @@
               </a:spcAft>
             </a:pPr>
             <a:r>
-              <a:rPr sz="1100" b="1">
+              <a:rPr sz="1100" b="1" dirty="0" err="1">
                 <a:solidFill>
                   <a:srgbClr val="03C75A"/>
                 </a:solidFill>
                 <a:latin typeface="맑은 고딕"/>
               </a:rPr>
-              <a:t>최종 배포</a:t>
-            </a:r>
+              <a:t>최종</a:t>
+            </a:r>
+            <a:r>
+              <a:rPr sz="1100" b="1" dirty="0">
+                <a:solidFill>
+                  <a:srgbClr val="03C75A"/>
+                </a:solidFill>
+                <a:latin typeface="맑은 고딕"/>
+              </a:rPr>
+              <a:t> </a:t>
+            </a:r>
+            <a:r>
+              <a:rPr sz="1100" b="1" dirty="0" err="1">
+                <a:solidFill>
+                  <a:srgbClr val="03C75A"/>
+                </a:solidFill>
+                <a:latin typeface="맑은 고딕"/>
+              </a:rPr>
+              <a:t>배포</a:t>
+            </a:r>
+            <a:endParaRPr sz="1100" b="1" dirty="0">
+              <a:solidFill>
+                <a:srgbClr val="03C75A"/>
+              </a:solidFill>
+              <a:latin typeface="맑은 고딕"/>
+            </a:endParaRPr>
           </a:p>
           <a:p>
             <a:pPr algn="l">
@@ -6427,15 +6790,48 @@
               </a:spcAft>
             </a:pPr>
             <a:r>
-              <a:rPr sz="1000" b="0">
+              <a:rPr sz="1000" b="0" dirty="0">
                 <a:solidFill>
                   <a:srgbClr val="5B6672"/>
                 </a:solidFill>
                 <a:latin typeface="맑은 고딕"/>
               </a:rPr>
-              <a:t>model/random_forest_
-enhanced.joblib</a:t>
-            </a:r>
+              <a:t>model/</a:t>
+            </a:r>
+            <a:r>
+              <a:rPr sz="1000" b="0" dirty="0" err="1">
+                <a:solidFill>
+                  <a:srgbClr val="5B6672"/>
+                </a:solidFill>
+                <a:latin typeface="맑은 고딕"/>
+              </a:rPr>
+              <a:t>random_forest</a:t>
+            </a:r>
+            <a:r>
+              <a:rPr sz="1000" b="0" dirty="0">
+                <a:solidFill>
+                  <a:srgbClr val="5B6672"/>
+                </a:solidFill>
+                <a:latin typeface="맑은 고딕"/>
+              </a:rPr>
+              <a:t>_
+</a:t>
+            </a:r>
+            <a:r>
+              <a:rPr sz="1000" b="0" dirty="0" err="1">
+                <a:solidFill>
+                  <a:srgbClr val="5B6672"/>
+                </a:solidFill>
+                <a:latin typeface="맑은 고딕"/>
+              </a:rPr>
+              <a:t>enhanced.joblib</a:t>
+            </a:r>
+            <a:endParaRPr sz="1000" b="0" dirty="0">
+              <a:solidFill>
+                <a:srgbClr val="5B6672"/>
+              </a:solidFill>
+              <a:latin typeface="맑은 고딕"/>
+            </a:endParaRPr>
           </a:p>
           <a:p>
             <a:pPr algn="l">
@@ -6444,7 +6840,7 @@
               </a:spcAft>
             </a:pPr>
             <a:r>
-              <a:rPr sz="900" b="0">
+              <a:rPr sz="900" b="0" dirty="0">
                 <a:solidFill>
                   <a:srgbClr val="5B6672"/>
                 </a:solidFill>
@@ -8899,8 +9295,8 @@
         </p:nvSpPr>
         <p:spPr>
           <a:xfrm>
-            <a:off x="685800" y="1828800"/>
-            <a:ext cx="5760720" cy="2554545"/>
+            <a:off x="685800" y="2735163"/>
+            <a:ext cx="5760720" cy="1661993"/>
           </a:xfrm>
           <a:prstGeom prst="rect">
             <a:avLst/>
@@ -9242,230 +9638,6 @@
                 <a:latin typeface="맑은 고딕"/>
               </a:rPr>
               <a:t>라벨</a:t>
-            </a:r>
-            <a:endParaRPr sz="1400" b="0" dirty="0">
-              <a:solidFill>
-                <a:srgbClr val="5B6672"/>
-              </a:solidFill>
-              <a:latin typeface="맑은 고딕"/>
-            </a:endParaRPr>
-          </a:p>
-          <a:p>
-            <a:pPr>
-              <a:spcAft>
-                <a:spcPts val="900"/>
-              </a:spcAft>
-            </a:pPr>
-            <a:r>
-              <a:rPr sz="1500" b="0" dirty="0">
-                <a:solidFill>
-                  <a:srgbClr val="1F2A37"/>
-                </a:solidFill>
-                <a:latin typeface="맑은 고딕"/>
-              </a:rPr>
-              <a:t>•  </a:t>
-            </a:r>
-            <a:r>
-              <a:rPr sz="1500" b="0" dirty="0" err="1">
-                <a:solidFill>
-                  <a:srgbClr val="1F2A37"/>
-                </a:solidFill>
-                <a:latin typeface="맑은 고딕"/>
-              </a:rPr>
-              <a:t>풀고자</a:t>
-            </a:r>
-            <a:r>
-              <a:rPr sz="1500" b="0" dirty="0">
-                <a:solidFill>
-                  <a:srgbClr val="1F2A37"/>
-                </a:solidFill>
-                <a:latin typeface="맑은 고딕"/>
-              </a:rPr>
-              <a:t> </a:t>
-            </a:r>
-            <a:r>
-              <a:rPr sz="1500" b="0" dirty="0" err="1">
-                <a:solidFill>
-                  <a:srgbClr val="1F2A37"/>
-                </a:solidFill>
-                <a:latin typeface="맑은 고딕"/>
-              </a:rPr>
-              <a:t>하는</a:t>
-            </a:r>
-            <a:r>
-              <a:rPr sz="1500" b="0" dirty="0">
-                <a:solidFill>
-                  <a:srgbClr val="1F2A37"/>
-                </a:solidFill>
-                <a:latin typeface="맑은 고딕"/>
-              </a:rPr>
-              <a:t> </a:t>
-            </a:r>
-            <a:r>
-              <a:rPr sz="1500" b="0" dirty="0" err="1">
-                <a:solidFill>
-                  <a:srgbClr val="1F2A37"/>
-                </a:solidFill>
-                <a:latin typeface="맑은 고딕"/>
-              </a:rPr>
-              <a:t>문제</a:t>
-            </a:r>
-            <a:endParaRPr sz="1500" b="0" dirty="0">
-              <a:solidFill>
-                <a:srgbClr val="1F2A37"/>
-              </a:solidFill>
-              <a:latin typeface="맑은 고딕"/>
-            </a:endParaRPr>
-          </a:p>
-          <a:p>
-            <a:pPr lvl="1">
-              <a:spcAft>
-                <a:spcPts val="900"/>
-              </a:spcAft>
-            </a:pPr>
-            <a:r>
-              <a:rPr sz="1400" b="0" dirty="0">
-                <a:solidFill>
-                  <a:srgbClr val="5B6672"/>
-                </a:solidFill>
-                <a:latin typeface="맑은 고딕"/>
-              </a:rPr>
-              <a:t>–  "</a:t>
-            </a:r>
-            <a:r>
-              <a:rPr sz="1400" b="0" dirty="0" err="1">
-                <a:solidFill>
-                  <a:srgbClr val="5B6672"/>
-                </a:solidFill>
-                <a:latin typeface="맑은 고딕"/>
-              </a:rPr>
-              <a:t>지금</a:t>
-            </a:r>
-            <a:r>
-              <a:rPr sz="1400" b="0" dirty="0">
-                <a:solidFill>
-                  <a:srgbClr val="5B6672"/>
-                </a:solidFill>
-                <a:latin typeface="맑은 고딕"/>
-              </a:rPr>
-              <a:t> 이 </a:t>
-            </a:r>
-            <a:r>
-              <a:rPr sz="1400" b="0" dirty="0" err="1">
-                <a:solidFill>
-                  <a:srgbClr val="5B6672"/>
-                </a:solidFill>
-                <a:latin typeface="맑은 고딕"/>
-              </a:rPr>
-              <a:t>센서</a:t>
-            </a:r>
-            <a:r>
-              <a:rPr sz="1400" b="0" dirty="0">
-                <a:solidFill>
-                  <a:srgbClr val="5B6672"/>
-                </a:solidFill>
-                <a:latin typeface="맑은 고딕"/>
-              </a:rPr>
-              <a:t> </a:t>
-            </a:r>
-            <a:r>
-              <a:rPr sz="1400" b="0" dirty="0" err="1">
-                <a:solidFill>
-                  <a:srgbClr val="5B6672"/>
-                </a:solidFill>
-                <a:latin typeface="맑은 고딕"/>
-              </a:rPr>
-              <a:t>상태면</a:t>
-            </a:r>
-            <a:r>
-              <a:rPr sz="1400" b="0" dirty="0">
-                <a:solidFill>
-                  <a:srgbClr val="5B6672"/>
-                </a:solidFill>
-                <a:latin typeface="맑은 고딕"/>
-              </a:rPr>
-              <a:t> </a:t>
-            </a:r>
-            <a:r>
-              <a:rPr sz="1400" b="0" dirty="0" err="1">
-                <a:solidFill>
-                  <a:srgbClr val="5B6672"/>
-                </a:solidFill>
-                <a:latin typeface="맑은 고딕"/>
-              </a:rPr>
-              <a:t>설비가</a:t>
-            </a:r>
-            <a:r>
-              <a:rPr sz="1400" b="0" dirty="0">
-                <a:solidFill>
-                  <a:srgbClr val="5B6672"/>
-                </a:solidFill>
-                <a:latin typeface="맑은 고딕"/>
-              </a:rPr>
-              <a:t> </a:t>
-            </a:r>
-            <a:r>
-              <a:rPr sz="1400" b="0" dirty="0" err="1">
-                <a:solidFill>
-                  <a:srgbClr val="5B6672"/>
-                </a:solidFill>
-                <a:latin typeface="맑은 고딕"/>
-              </a:rPr>
-              <a:t>고장인가</a:t>
-            </a:r>
-            <a:r>
-              <a:rPr sz="1400" b="0" dirty="0">
-                <a:solidFill>
-                  <a:srgbClr val="5B6672"/>
-                </a:solidFill>
-                <a:latin typeface="맑은 고딕"/>
-              </a:rPr>
-              <a:t>?" — </a:t>
-            </a:r>
-            <a:r>
-              <a:rPr sz="1400" b="0" dirty="0" err="1">
-                <a:solidFill>
-                  <a:srgbClr val="5B6672"/>
-                </a:solidFill>
-                <a:latin typeface="맑은 고딕"/>
-              </a:rPr>
-              <a:t>설비</a:t>
-            </a:r>
-            <a:r>
-              <a:rPr sz="1400" b="0" dirty="0">
-                <a:solidFill>
-                  <a:srgbClr val="5B6672"/>
-                </a:solidFill>
-                <a:latin typeface="맑은 고딕"/>
-              </a:rPr>
-              <a:t> </a:t>
-            </a:r>
-            <a:r>
-              <a:rPr sz="1400" b="0" dirty="0" err="1">
-                <a:solidFill>
-                  <a:srgbClr val="5B6672"/>
-                </a:solidFill>
-                <a:latin typeface="맑은 고딕"/>
-              </a:rPr>
-              <a:t>진단</a:t>
-            </a:r>
-            <a:r>
-              <a:rPr sz="1400" b="0" dirty="0">
-                <a:solidFill>
-                  <a:srgbClr val="5B6672"/>
-                </a:solidFill>
-                <a:latin typeface="맑은 고딕"/>
-              </a:rPr>
-              <a:t> </a:t>
-            </a:r>
-            <a:r>
-              <a:rPr sz="1400" b="0" dirty="0" err="1">
-                <a:solidFill>
-                  <a:srgbClr val="5B6672"/>
-                </a:solidFill>
-                <a:latin typeface="맑은 고딕"/>
-              </a:rPr>
-              <a:t>이진분류</a:t>
             </a:r>
             <a:endParaRPr sz="1400" b="0" dirty="0">
               <a:solidFill>
@@ -13887,7 +14059,13 @@
           <p:cNvGraphicFramePr>
             <a:graphicFrameLocks noGrp="1"/>
           </p:cNvGraphicFramePr>
-          <p:nvPr/>
+          <p:nvPr>
+            <p:extLst>
+              <p:ext uri="{D42A27DB-BD31-4B8C-83A1-F6EECF244321}">
+                <p14:modId xmlns:p14="http://schemas.microsoft.com/office/powerpoint/2010/main" val="119245126"/>
+              </p:ext>
+            </p:extLst>
+          </p:nvPr>
         </p:nvGraphicFramePr>
         <p:xfrm>
           <a:off x="822960" y="3063240"/>
@@ -14158,7 +14336,7 @@
                     <a:p>
                       <a:pPr algn="ctr"/>
                       <a:r>
-                        <a:rPr sz="1200" b="0">
+                        <a:rPr sz="1200" b="1" dirty="0">
                           <a:solidFill>
                             <a:srgbClr val="1F2A37"/>
                           </a:solidFill>
@@ -14280,7 +14458,7 @@
                     <a:p>
                       <a:pPr algn="ctr"/>
                       <a:r>
-                        <a:rPr sz="1200" b="0">
+                        <a:rPr sz="1200" b="1" dirty="0">
                           <a:solidFill>
                             <a:srgbClr val="1F2A37"/>
                           </a:solidFill>
@@ -14402,7 +14580,7 @@
                     <a:p>
                       <a:pPr algn="ctr"/>
                       <a:r>
-                        <a:rPr sz="1200" b="0" dirty="0">
+                        <a:rPr sz="1200" b="1" dirty="0">
                           <a:solidFill>
                             <a:srgbClr val="1F2A37"/>
                           </a:solidFill>
@@ -15631,10 +15809,16 @@
           <p:cNvGraphicFramePr>
             <a:graphicFrameLocks noGrp="1"/>
           </p:cNvGraphicFramePr>
-          <p:nvPr/>
+          <p:nvPr>
+            <p:extLst>
+              <p:ext uri="{D42A27DB-BD31-4B8C-83A1-F6EECF244321}">
+                <p14:modId xmlns:p14="http://schemas.microsoft.com/office/powerpoint/2010/main" val="1562668221"/>
+              </p:ext>
+            </p:extLst>
+          </p:nvPr>
         </p:nvGraphicFramePr>
         <p:xfrm>
-          <a:off x="822960" y="3840480"/>
+          <a:off x="868680" y="4197096"/>
           <a:ext cx="10515600" cy="932688"/>
         </p:xfrm>
         <a:graphic>
@@ -16024,7 +16208,7 @@
                     <a:p>
                       <a:pPr algn="ctr"/>
                       <a:r>
-                        <a:rPr sz="1200" b="0">
+                        <a:rPr sz="1200" b="0" dirty="0">
                           <a:solidFill>
                             <a:srgbClr val="1F2A37"/>
                           </a:solidFill>
